--- a/STARLAB_Slide_Decks_All/18_Answering_Questions_Like_a_Scientist.pptx
+++ b/STARLAB_Slide_Decks_All/18_Answering_Questions_Like_a_Scientist.pptx
@@ -2,38 +2,38 @@
 <file path=ppt/presentation.xml><?xml version="1.0" encoding="utf-8"?>
 <p:presentation xmlns:p="http://schemas.openxmlformats.org/presentationml/2006/main" embedTrueTypeFonts="1" saveSubsetFonts="0">
   <p:sldMasterIdLst>
-    <p:sldMasterId xmlns:r="http://schemas.openxmlformats.org/officeDocument/2006/relationships" id="2147483648" r:id="R3e721fec2a874127"/>
+    <p:sldMasterId xmlns:r="http://schemas.openxmlformats.org/officeDocument/2006/relationships" id="2147483648" r:id="R3564a0ccc1724c05"/>
   </p:sldMasterIdLst>
   <p:notesMasterIdLst>
-    <p:notesMasterId xmlns:r="http://schemas.openxmlformats.org/officeDocument/2006/relationships" r:id="R246da42e6b06490e"/>
+    <p:notesMasterId xmlns:r="http://schemas.openxmlformats.org/officeDocument/2006/relationships" r:id="R497244f3c6a54036"/>
   </p:notesMasterIdLst>
   <p:sldIdLst>
-    <p:sldId xmlns:r="http://schemas.openxmlformats.org/officeDocument/2006/relationships" id="256" r:id="R6626e8cdccbf40c2"/>
-    <p:sldId xmlns:r="http://schemas.openxmlformats.org/officeDocument/2006/relationships" id="257" r:id="R644f82597f634745"/>
-    <p:sldId xmlns:r="http://schemas.openxmlformats.org/officeDocument/2006/relationships" id="258" r:id="R3d18e54635224684"/>
-    <p:sldId xmlns:r="http://schemas.openxmlformats.org/officeDocument/2006/relationships" id="259" r:id="R16f21bececea4f68"/>
-    <p:sldId xmlns:r="http://schemas.openxmlformats.org/officeDocument/2006/relationships" id="260" r:id="Rdf54b409ca9642b5"/>
-    <p:sldId xmlns:r="http://schemas.openxmlformats.org/officeDocument/2006/relationships" id="261" r:id="R3679fa09174c47ec"/>
-    <p:sldId xmlns:r="http://schemas.openxmlformats.org/officeDocument/2006/relationships" id="262" r:id="Rf618857021094b0d"/>
-    <p:sldId xmlns:r="http://schemas.openxmlformats.org/officeDocument/2006/relationships" id="263" r:id="R9f88b5e6562d4fee"/>
-    <p:sldId xmlns:r="http://schemas.openxmlformats.org/officeDocument/2006/relationships" id="264" r:id="R42a8ae50fbb84988"/>
-    <p:sldId xmlns:r="http://schemas.openxmlformats.org/officeDocument/2006/relationships" id="265" r:id="Rd59e51983e314c66"/>
-    <p:sldId xmlns:r="http://schemas.openxmlformats.org/officeDocument/2006/relationships" id="266" r:id="R59f44c1941af4faf"/>
-    <p:sldId xmlns:r="http://schemas.openxmlformats.org/officeDocument/2006/relationships" id="267" r:id="R540b2cc88ae2444e"/>
-    <p:sldId xmlns:r="http://schemas.openxmlformats.org/officeDocument/2006/relationships" id="268" r:id="R746da73fa2d74942"/>
-    <p:sldId xmlns:r="http://schemas.openxmlformats.org/officeDocument/2006/relationships" id="269" r:id="Rf01f8a448c974941"/>
-    <p:sldId xmlns:r="http://schemas.openxmlformats.org/officeDocument/2006/relationships" id="270" r:id="R4099ddb8dd194e23"/>
-    <p:sldId xmlns:r="http://schemas.openxmlformats.org/officeDocument/2006/relationships" id="271" r:id="Rb0ce8c0d0698400c"/>
-    <p:sldId xmlns:r="http://schemas.openxmlformats.org/officeDocument/2006/relationships" id="272" r:id="R38d5dc466d5c4129"/>
-    <p:sldId xmlns:r="http://schemas.openxmlformats.org/officeDocument/2006/relationships" id="273" r:id="Rd3823f95cd9d49ee"/>
+    <p:sldId xmlns:r="http://schemas.openxmlformats.org/officeDocument/2006/relationships" id="256" r:id="Re25da4e185444340"/>
+    <p:sldId xmlns:r="http://schemas.openxmlformats.org/officeDocument/2006/relationships" id="257" r:id="Re19e8a26acc54181"/>
+    <p:sldId xmlns:r="http://schemas.openxmlformats.org/officeDocument/2006/relationships" id="258" r:id="R4cd85401aa05412d"/>
+    <p:sldId xmlns:r="http://schemas.openxmlformats.org/officeDocument/2006/relationships" id="259" r:id="R25d86c944359468a"/>
+    <p:sldId xmlns:r="http://schemas.openxmlformats.org/officeDocument/2006/relationships" id="260" r:id="R013f1b40364748aa"/>
+    <p:sldId xmlns:r="http://schemas.openxmlformats.org/officeDocument/2006/relationships" id="261" r:id="Rc1448719799840f9"/>
+    <p:sldId xmlns:r="http://schemas.openxmlformats.org/officeDocument/2006/relationships" id="262" r:id="R19912d32a5f04daa"/>
+    <p:sldId xmlns:r="http://schemas.openxmlformats.org/officeDocument/2006/relationships" id="263" r:id="R5ed5a5b087b04167"/>
+    <p:sldId xmlns:r="http://schemas.openxmlformats.org/officeDocument/2006/relationships" id="264" r:id="R1f714eaf16294044"/>
+    <p:sldId xmlns:r="http://schemas.openxmlformats.org/officeDocument/2006/relationships" id="265" r:id="R4192ad9cd2b84721"/>
+    <p:sldId xmlns:r="http://schemas.openxmlformats.org/officeDocument/2006/relationships" id="266" r:id="R9fc0c0d4dbe641be"/>
+    <p:sldId xmlns:r="http://schemas.openxmlformats.org/officeDocument/2006/relationships" id="267" r:id="R7449d052203f46cf"/>
+    <p:sldId xmlns:r="http://schemas.openxmlformats.org/officeDocument/2006/relationships" id="268" r:id="Rdc6821f2d5e44f40"/>
+    <p:sldId xmlns:r="http://schemas.openxmlformats.org/officeDocument/2006/relationships" id="269" r:id="R094d4cc5d3974567"/>
+    <p:sldId xmlns:r="http://schemas.openxmlformats.org/officeDocument/2006/relationships" id="270" r:id="R9c5b1032b8d44aad"/>
+    <p:sldId xmlns:r="http://schemas.openxmlformats.org/officeDocument/2006/relationships" id="271" r:id="Rdcea9defce184629"/>
+    <p:sldId xmlns:r="http://schemas.openxmlformats.org/officeDocument/2006/relationships" id="272" r:id="Rffaf3a4b70e2474a"/>
+    <p:sldId xmlns:r="http://schemas.openxmlformats.org/officeDocument/2006/relationships" id="273" r:id="R976340041eac4537"/>
   </p:sldIdLst>
   <p:sldSz cx="12192000" cy="6858000"/>
   <p:notesSz cx="6858000" cy="9144000"/>
   <p:embeddedFontLst>
     <p:embeddedFont>
       <p:font typeface="Play"/>
-      <p:regular xmlns:r="http://schemas.openxmlformats.org/officeDocument/2006/relationships" r:id="R612887ee76134fb9"/>
-      <p:bold xmlns:r="http://schemas.openxmlformats.org/officeDocument/2006/relationships" r:id="R16f84d6e9ef74a22"/>
+      <p:regular xmlns:r="http://schemas.openxmlformats.org/officeDocument/2006/relationships" r:id="R444e01ab157543ae"/>
+      <p:bold xmlns:r="http://schemas.openxmlformats.org/officeDocument/2006/relationships" r:id="R174d5fa123bc4188"/>
     </p:embeddedFont>
   </p:embeddedFontLst>
   <p:defaultTextStyle>
@@ -817,6 +817,48 @@
               <a:buNone/>
             </a:pPr>
             <a:r>
+              <a:t>OPTIONAL / TEACHER SCORING REFERENCE FOR WEEKS 31-32</a:t>
+            </a:r>
+          </a:p>
+          <a:p xmlns:a="http://schemas.openxmlformats.org/drawingml/2006/main">
+            <a:pPr marL="0" indent="0" algn="l">
+              <a:spcBef>
+                <a:spcPts val="0"/>
+              </a:spcBef>
+              <a:spcAft>
+                <a:spcPts val="0"/>
+              </a:spcAft>
+              <a:buNone/>
+            </a:pPr>
+            <a:r>
+              <a:t>- Unit 6 Appendix L: Oral Presentation Rubric</a:t>
+            </a:r>
+          </a:p>
+          <a:p xmlns:a="http://schemas.openxmlformats.org/drawingml/2006/main">
+            <a:pPr marL="0" indent="0" algn="l">
+              <a:spcBef>
+                <a:spcPts val="0"/>
+              </a:spcBef>
+              <a:spcAft>
+                <a:spcPts val="0"/>
+              </a:spcAft>
+              <a:buNone/>
+            </a:pPr>
+            <a:r>
+              <a:t/>
+            </a:r>
+          </a:p>
+          <a:p xmlns:a="http://schemas.openxmlformats.org/drawingml/2006/main">
+            <a:pPr marL="0" indent="0" algn="l">
+              <a:spcBef>
+                <a:spcPts val="0"/>
+              </a:spcBef>
+              <a:spcAft>
+                <a:spcPts val="0"/>
+              </a:spcAft>
+              <a:buNone/>
+            </a:pPr>
+            <a:r>
               <a:t>RESOURCE ALIGNMENT</a:t>
             </a:r>
           </a:p>
@@ -2465,7 +2507,7 @@
   </p:cSld>
   <p:clrMap bg1="lt1" tx1="dk1" bg2="dk2" tx2="lt2" accent1="accent1" accent2="accent2" accent3="accent3" accent4="accent4" accent5="accent5" accent6="accent6" hlink="hlink" folHlink="folHlink"/>
   <p:sldLayoutIdLst>
-    <p:sldLayoutId xmlns:r="http://schemas.openxmlformats.org/officeDocument/2006/relationships" id="2147483649" r:id="R108dacf31f354713"/>
+    <p:sldLayoutId xmlns:r="http://schemas.openxmlformats.org/officeDocument/2006/relationships" id="2147483649" r:id="Rdaca305258c4479d"/>
   </p:sldLayoutIdLst>
   <p:hf sldNum="0" hdr="0" ftr="0" dt="0"/>
   <p:txStyles>
@@ -3588,7 +3630,7 @@
           <p:nvPr/>
         </p:nvPicPr>
         <p:blipFill rotWithShape="1">
-          <a:blip xmlns:r="http://schemas.openxmlformats.org/officeDocument/2006/relationships" xmlns:a="http://schemas.openxmlformats.org/drawingml/2006/main" r:embed="R298e5071da9a4480">
+          <a:blip xmlns:r="http://schemas.openxmlformats.org/officeDocument/2006/relationships" xmlns:a="http://schemas.openxmlformats.org/drawingml/2006/main" r:embed="R0c77f841d1d64830">
             <a:alphaModFix/>
           </a:blip>
           <a:srcRect xmlns:a="http://schemas.openxmlformats.org/drawingml/2006/main" l="0" t="0" r="0" b="0"/>
@@ -9640,7 +9682,7 @@
       </p:sp>
       <p:cxnSp>
         <p:nvCxnSpPr>
-          <p:cNvPr id="357" name="Google Shape;344;p16"/>
+          <p:cNvPr id="369" name="Google Shape;344;p16"/>
           <p:cNvCxnSpPr/>
           <p:nvPr/>
         </p:nvCxnSpPr>
@@ -11958,7 +12000,7 @@
       </p:sp>
       <p:cxnSp>
         <p:nvCxnSpPr>
-          <p:cNvPr id="404" name="Google Shape;391;p18"/>
+          <p:cNvPr id="416" name="Google Shape;391;p18"/>
           <p:cNvCxnSpPr/>
           <p:nvPr/>
         </p:nvCxnSpPr>
@@ -21167,7 +21209,7 @@
       </p:sp>
       <p:cxnSp>
         <p:nvCxnSpPr>
-          <p:cNvPr id="170" name="Google Shape;157;p8"/>
+          <p:cNvPr id="182" name="Google Shape;157;p8"/>
           <p:cNvCxnSpPr/>
           <p:nvPr/>
         </p:nvCxnSpPr>
@@ -24592,7 +24634,7 @@
       </p:sp>
       <p:cxnSp>
         <p:nvCxnSpPr>
-          <p:cNvPr id="238" name="Google Shape;225;p11"/>
+          <p:cNvPr id="250" name="Google Shape;225;p11"/>
           <p:cNvCxnSpPr/>
           <p:nvPr/>
         </p:nvCxnSpPr>
